--- a/VOIS_Major_Project_PPT_Submission_Template.pptx
+++ b/VOIS_Major_Project_PPT_Submission_Template.pptx
@@ -163,7 +163,7 @@
 <file path=ppt/revisionInfo.xml><?xml version="1.0" encoding="utf-8"?>
 <p1510:revInfo xmlns:a="http://schemas.openxmlformats.org/drawingml/2006/main" xmlns:r="http://schemas.openxmlformats.org/officeDocument/2006/relationships" xmlns:p1510="http://schemas.microsoft.com/office/powerpoint/2015/10/main">
   <p1510:revLst>
-    <p1510:client id="{ABEE10E6-4371-4621-B13F-38CDCD242604}" v="141" dt="2026-09-10T17:13:12.538"/>
+    <p1510:client id="{ABEE10E6-4371-4621-B13F-38CDCD242604}" v="142" dt="2026-09-10T18:08:02.839"/>
   </p1510:revLst>
 </p1510:revInfo>
 </file>
@@ -173,7 +173,7 @@
   <pc:docChgLst>
     <pc:chgData name="Chennuboyina Siva Sruthi" userId="757dd6f6081b8728" providerId="LiveId" clId="{88ED0A32-7A4F-4E9F-9492-1FFBEDFADE5C}"/>
     <pc:docChg chg="custSel modSld">
-      <pc:chgData name="Chennuboyina Siva Sruthi" userId="757dd6f6081b8728" providerId="LiveId" clId="{88ED0A32-7A4F-4E9F-9492-1FFBEDFADE5C}" dt="2026-09-10T17:31:53.451" v="323" actId="14100"/>
+      <pc:chgData name="Chennuboyina Siva Sruthi" userId="757dd6f6081b8728" providerId="LiveId" clId="{88ED0A32-7A4F-4E9F-9492-1FFBEDFADE5C}" dt="2026-09-10T18:10:08.595" v="358" actId="20577"/>
       <pc:docMkLst>
         <pc:docMk/>
       </pc:docMkLst>
@@ -189,6 +189,21 @@
             <pc:docMk/>
             <pc:sldMk cId="1341901065" sldId="302"/>
             <ac:spMk id="7" creationId="{B21C28F5-3CA3-4B78-B5C9-550C00BB3174}"/>
+          </ac:spMkLst>
+        </pc:spChg>
+      </pc:sldChg>
+      <pc:sldChg chg="modSp mod">
+        <pc:chgData name="Chennuboyina Siva Sruthi" userId="757dd6f6081b8728" providerId="LiveId" clId="{88ED0A32-7A4F-4E9F-9492-1FFBEDFADE5C}" dt="2026-09-10T18:09:12.875" v="355" actId="20577"/>
+        <pc:sldMkLst>
+          <pc:docMk/>
+          <pc:sldMk cId="3401748718" sldId="304"/>
+        </pc:sldMkLst>
+        <pc:spChg chg="mod">
+          <ac:chgData name="Chennuboyina Siva Sruthi" userId="757dd6f6081b8728" providerId="LiveId" clId="{88ED0A32-7A4F-4E9F-9492-1FFBEDFADE5C}" dt="2026-09-10T18:09:12.875" v="355" actId="20577"/>
+          <ac:spMkLst>
+            <pc:docMk/>
+            <pc:sldMk cId="3401748718" sldId="304"/>
+            <ac:spMk id="12" creationId="{BC277FD7-925B-4C3D-A364-118403201507}"/>
           </ac:spMkLst>
         </pc:spChg>
       </pc:sldChg>
@@ -231,7 +246,7 @@
         </pc:spChg>
       </pc:sldChg>
       <pc:sldChg chg="modSp mod">
-        <pc:chgData name="Chennuboyina Siva Sruthi" userId="757dd6f6081b8728" providerId="LiveId" clId="{88ED0A32-7A4F-4E9F-9492-1FFBEDFADE5C}" dt="2026-09-10T17:10:55.538" v="194" actId="14100"/>
+        <pc:chgData name="Chennuboyina Siva Sruthi" userId="757dd6f6081b8728" providerId="LiveId" clId="{88ED0A32-7A4F-4E9F-9492-1FFBEDFADE5C}" dt="2026-09-10T18:10:08.595" v="358" actId="20577"/>
         <pc:sldMkLst>
           <pc:docMk/>
           <pc:sldMk cId="1604013440" sldId="338"/>
@@ -245,7 +260,7 @@
           </ac:spMkLst>
         </pc:spChg>
         <pc:spChg chg="mod">
-          <ac:chgData name="Chennuboyina Siva Sruthi" userId="757dd6f6081b8728" providerId="LiveId" clId="{88ED0A32-7A4F-4E9F-9492-1FFBEDFADE5C}" dt="2026-09-10T17:10:55.538" v="194" actId="14100"/>
+          <ac:chgData name="Chennuboyina Siva Sruthi" userId="757dd6f6081b8728" providerId="LiveId" clId="{88ED0A32-7A4F-4E9F-9492-1FFBEDFADE5C}" dt="2026-09-10T18:10:08.595" v="358" actId="20577"/>
           <ac:spMkLst>
             <pc:docMk/>
             <pc:sldMk cId="1604013440" sldId="338"/>
@@ -254,7 +269,7 @@
         </pc:spChg>
       </pc:sldChg>
       <pc:sldChg chg="addSp modSp mod">
-        <pc:chgData name="Chennuboyina Siva Sruthi" userId="757dd6f6081b8728" providerId="LiveId" clId="{88ED0A32-7A4F-4E9F-9492-1FFBEDFADE5C}" dt="2026-09-10T17:26:54.607" v="292" actId="1076"/>
+        <pc:chgData name="Chennuboyina Siva Sruthi" userId="757dd6f6081b8728" providerId="LiveId" clId="{88ED0A32-7A4F-4E9F-9492-1FFBEDFADE5C}" dt="2026-09-10T18:09:30.886" v="356" actId="14100"/>
         <pc:sldMkLst>
           <pc:docMk/>
           <pc:sldMk cId="1086225493" sldId="339"/>
@@ -276,7 +291,7 @@
           </ac:picMkLst>
         </pc:picChg>
         <pc:picChg chg="add mod">
-          <ac:chgData name="Chennuboyina Siva Sruthi" userId="757dd6f6081b8728" providerId="LiveId" clId="{88ED0A32-7A4F-4E9F-9492-1FFBEDFADE5C}" dt="2026-09-10T17:25:13.432" v="274" actId="14100"/>
+          <ac:chgData name="Chennuboyina Siva Sruthi" userId="757dd6f6081b8728" providerId="LiveId" clId="{88ED0A32-7A4F-4E9F-9492-1FFBEDFADE5C}" dt="2026-09-10T18:09:30.886" v="356" actId="14100"/>
           <ac:picMkLst>
             <pc:docMk/>
             <pc:sldMk cId="1086225493" sldId="339"/>
@@ -343,6 +358,21 @@
             <pc:docMk/>
             <pc:sldMk cId="776828144" sldId="341"/>
             <ac:spMk id="3" creationId="{F5A24007-2527-0B45-264E-78B2B3E45F65}"/>
+          </ac:spMkLst>
+        </pc:spChg>
+      </pc:sldChg>
+      <pc:sldChg chg="modSp mod">
+        <pc:chgData name="Chennuboyina Siva Sruthi" userId="757dd6f6081b8728" providerId="LiveId" clId="{88ED0A32-7A4F-4E9F-9492-1FFBEDFADE5C}" dt="2026-09-10T18:08:02.838" v="325"/>
+        <pc:sldMkLst>
+          <pc:docMk/>
+          <pc:sldMk cId="3863610428" sldId="342"/>
+        </pc:sldMkLst>
+        <pc:spChg chg="mod">
+          <ac:chgData name="Chennuboyina Siva Sruthi" userId="757dd6f6081b8728" providerId="LiveId" clId="{88ED0A32-7A4F-4E9F-9492-1FFBEDFADE5C}" dt="2026-09-10T18:08:02.838" v="325"/>
+          <ac:spMkLst>
+            <pc:docMk/>
+            <pc:sldMk cId="3863610428" sldId="342"/>
+            <ac:spMk id="3" creationId="{5F0B37E4-66B1-8633-7266-68B321742757}"/>
           </ac:spMkLst>
         </pc:spChg>
       </pc:sldChg>
@@ -10862,7 +10892,7 @@
           <a:p>
             <a:r>
               <a:rPr lang="en-US" b="1" dirty="0"/>
-              <a:t>AICTE STU ID : (STU6a68e4b35bda81785259187)</a:t>
+              <a:t>AICTE STU ID : STU6a68e4b35bda81785259187</a:t>
             </a:r>
           </a:p>
         </p:txBody>
@@ -14244,7 +14274,7 @@
         <p:spPr>
           <a:xfrm>
             <a:off x="729256" y="1440320"/>
-            <a:ext cx="7232875" cy="646331"/>
+            <a:ext cx="7232875" cy="369332"/>
           </a:xfrm>
           <a:prstGeom prst="rect">
             <a:avLst/>
@@ -14259,7 +14289,7 @@
           <a:p>
             <a:r>
               <a:rPr lang="en-US" dirty="0"/>
-              <a:t>https://github.com/AswiniKumar55/-Seasonal-Agriculture-Performance-Analysis-.git</a:t>
+              <a:t>https://github.com/chennuboyinasivasruthi-ops/VOIS_Project</a:t>
             </a:r>
           </a:p>
         </p:txBody>
@@ -19813,8 +19843,8 @@
         </p:blipFill>
         <p:spPr>
           <a:xfrm>
-            <a:off x="4257652" y="1158758"/>
-            <a:ext cx="4225786" cy="2685272"/>
+            <a:off x="4345694" y="1158758"/>
+            <a:ext cx="4137744" cy="2685272"/>
           </a:xfrm>
           <a:prstGeom prst="rect">
             <a:avLst/>

--- a/VOIS_Major_Project_PPT_Submission_Template.pptx
+++ b/VOIS_Major_Project_PPT_Submission_Template.pptx
@@ -163,7 +163,7 @@
 <file path=ppt/revisionInfo.xml><?xml version="1.0" encoding="utf-8"?>
 <p1510:revInfo xmlns:a="http://schemas.openxmlformats.org/drawingml/2006/main" xmlns:r="http://schemas.openxmlformats.org/officeDocument/2006/relationships" xmlns:p1510="http://schemas.microsoft.com/office/powerpoint/2015/10/main">
   <p1510:revLst>
-    <p1510:client id="{ABEE10E6-4371-4621-B13F-38CDCD242604}" v="142" dt="2026-09-10T18:08:02.839"/>
+    <p1510:client id="{ABEE10E6-4371-4621-B13F-38CDCD242604}" v="145" dt="2026-09-13T15:21:49.517"/>
   </p1510:revLst>
 </p1510:revInfo>
 </file>
@@ -173,7 +173,7 @@
   <pc:docChgLst>
     <pc:chgData name="Chennuboyina Siva Sruthi" userId="757dd6f6081b8728" providerId="LiveId" clId="{88ED0A32-7A4F-4E9F-9492-1FFBEDFADE5C}"/>
     <pc:docChg chg="custSel modSld">
-      <pc:chgData name="Chennuboyina Siva Sruthi" userId="757dd6f6081b8728" providerId="LiveId" clId="{88ED0A32-7A4F-4E9F-9492-1FFBEDFADE5C}" dt="2026-09-10T18:10:08.595" v="358" actId="20577"/>
+      <pc:chgData name="Chennuboyina Siva Sruthi" userId="757dd6f6081b8728" providerId="LiveId" clId="{88ED0A32-7A4F-4E9F-9492-1FFBEDFADE5C}" dt="2026-09-13T15:22:15.711" v="367" actId="14100"/>
       <pc:docMkLst>
         <pc:docMk/>
       </pc:docMkLst>
@@ -228,14 +228,6 @@
           <pc:docMk/>
           <pc:sldMk cId="48075006" sldId="329"/>
         </pc:sldMkLst>
-        <pc:spChg chg="del mod">
-          <ac:chgData name="Chennuboyina Siva Sruthi" userId="757dd6f6081b8728" providerId="LiveId" clId="{88ED0A32-7A4F-4E9F-9492-1FFBEDFADE5C}" dt="2026-09-10T17:12:31.654" v="201" actId="21"/>
-          <ac:spMkLst>
-            <pc:docMk/>
-            <pc:sldMk cId="48075006" sldId="329"/>
-            <ac:spMk id="2" creationId="{664E3B60-2780-459A-8583-F095D5E7463A}"/>
-          </ac:spMkLst>
-        </pc:spChg>
         <pc:spChg chg="add mod">
           <ac:chgData name="Chennuboyina Siva Sruthi" userId="757dd6f6081b8728" providerId="LiveId" clId="{88ED0A32-7A4F-4E9F-9492-1FFBEDFADE5C}" dt="2026-09-10T17:13:19.819" v="203" actId="14100"/>
           <ac:spMkLst>
@@ -245,14 +237,14 @@
           </ac:spMkLst>
         </pc:spChg>
       </pc:sldChg>
-      <pc:sldChg chg="modSp mod">
-        <pc:chgData name="Chennuboyina Siva Sruthi" userId="757dd6f6081b8728" providerId="LiveId" clId="{88ED0A32-7A4F-4E9F-9492-1FFBEDFADE5C}" dt="2026-09-10T18:10:08.595" v="358" actId="20577"/>
+      <pc:sldChg chg="addSp delSp modSp mod">
+        <pc:chgData name="Chennuboyina Siva Sruthi" userId="757dd6f6081b8728" providerId="LiveId" clId="{88ED0A32-7A4F-4E9F-9492-1FFBEDFADE5C}" dt="2026-09-13T15:22:15.711" v="367" actId="14100"/>
         <pc:sldMkLst>
           <pc:docMk/>
           <pc:sldMk cId="1604013440" sldId="338"/>
         </pc:sldMkLst>
         <pc:spChg chg="mod">
-          <ac:chgData name="Chennuboyina Siva Sruthi" userId="757dd6f6081b8728" providerId="LiveId" clId="{88ED0A32-7A4F-4E9F-9492-1FFBEDFADE5C}" dt="2026-09-10T17:09:15.717" v="171" actId="20577"/>
+          <ac:chgData name="Chennuboyina Siva Sruthi" userId="757dd6f6081b8728" providerId="LiveId" clId="{88ED0A32-7A4F-4E9F-9492-1FFBEDFADE5C}" dt="2026-09-13T15:22:15.711" v="367" actId="14100"/>
           <ac:spMkLst>
             <pc:docMk/>
             <pc:sldMk cId="1604013440" sldId="338"/>
@@ -265,6 +257,22 @@
             <pc:docMk/>
             <pc:sldMk cId="1604013440" sldId="338"/>
             <ac:spMk id="3" creationId="{17F04107-8754-E47D-3375-529E689711FA}"/>
+          </ac:spMkLst>
+        </pc:spChg>
+        <pc:spChg chg="mod">
+          <ac:chgData name="Chennuboyina Siva Sruthi" userId="757dd6f6081b8728" providerId="LiveId" clId="{88ED0A32-7A4F-4E9F-9492-1FFBEDFADE5C}" dt="2026-09-13T15:21:55.434" v="366" actId="14100"/>
+          <ac:spMkLst>
+            <pc:docMk/>
+            <pc:sldMk cId="1604013440" sldId="338"/>
+            <ac:spMk id="4" creationId="{92056599-CDAA-4367-BEF8-31D6E32518C8}"/>
+          </ac:spMkLst>
+        </pc:spChg>
+        <pc:spChg chg="add del mod">
+          <ac:chgData name="Chennuboyina Siva Sruthi" userId="757dd6f6081b8728" providerId="LiveId" clId="{88ED0A32-7A4F-4E9F-9492-1FFBEDFADE5C}" dt="2026-09-13T15:21:45.170" v="363"/>
+          <ac:spMkLst>
+            <pc:docMk/>
+            <pc:sldMk cId="1604013440" sldId="338"/>
+            <ac:spMk id="5" creationId="{D7ABC13A-044C-EBFE-51DE-EC863528AAE4}"/>
           </ac:spMkLst>
         </pc:spChg>
       </pc:sldChg>
@@ -329,14 +337,6 @@
             <ac:picMk id="3" creationId="{B27E8547-5BC1-8FE1-D205-B8D3806C4B6E}"/>
           </ac:picMkLst>
         </pc:picChg>
-        <pc:picChg chg="add del mod">
-          <ac:chgData name="Chennuboyina Siva Sruthi" userId="757dd6f6081b8728" providerId="LiveId" clId="{88ED0A32-7A4F-4E9F-9492-1FFBEDFADE5C}" dt="2026-09-10T17:31:17.078" v="313" actId="21"/>
-          <ac:picMkLst>
-            <pc:docMk/>
-            <pc:sldMk cId="3849627828" sldId="340"/>
-            <ac:picMk id="9" creationId="{C4845290-4F59-46C1-83BA-B6DA7C28C370}"/>
-          </ac:picMkLst>
-        </pc:picChg>
         <pc:picChg chg="add mod">
           <ac:chgData name="Chennuboyina Siva Sruthi" userId="757dd6f6081b8728" providerId="LiveId" clId="{88ED0A32-7A4F-4E9F-9492-1FFBEDFADE5C}" dt="2026-09-10T17:31:36.174" v="317" actId="14100"/>
           <ac:picMkLst>
@@ -382,126 +382,6 @@
           <pc:docMk/>
           <pc:sldMk cId="3962802212" sldId="343"/>
         </pc:sldMkLst>
-        <pc:spChg chg="mod">
-          <ac:chgData name="Chennuboyina Siva Sruthi" userId="757dd6f6081b8728" providerId="LiveId" clId="{88ED0A32-7A4F-4E9F-9492-1FFBEDFADE5C}" dt="2026-09-10T17:00:44.312" v="17" actId="14100"/>
-          <ac:spMkLst>
-            <pc:docMk/>
-            <pc:sldMk cId="3962802212" sldId="343"/>
-            <ac:spMk id="15" creationId="{0750655E-F8CC-FCDE-B7AE-B74BE1D4ED69}"/>
-          </ac:spMkLst>
-        </pc:spChg>
-        <pc:spChg chg="mod">
-          <ac:chgData name="Chennuboyina Siva Sruthi" userId="757dd6f6081b8728" providerId="LiveId" clId="{88ED0A32-7A4F-4E9F-9492-1FFBEDFADE5C}" dt="2026-09-10T16:24:52.939" v="13"/>
-          <ac:spMkLst>
-            <pc:docMk/>
-            <pc:sldMk cId="3962802212" sldId="343"/>
-            <ac:spMk id="16" creationId="{8BCADF4E-C760-9662-2E12-C8F37CBC0456}"/>
-          </ac:spMkLst>
-        </pc:spChg>
-        <pc:spChg chg="mod">
-          <ac:chgData name="Chennuboyina Siva Sruthi" userId="757dd6f6081b8728" providerId="LiveId" clId="{88ED0A32-7A4F-4E9F-9492-1FFBEDFADE5C}" dt="2026-09-10T16:24:52.939" v="13"/>
-          <ac:spMkLst>
-            <pc:docMk/>
-            <pc:sldMk cId="3962802212" sldId="343"/>
-            <ac:spMk id="17" creationId="{1898CABE-80B6-B4CD-A0BC-5FA107B5FB8B}"/>
-          </ac:spMkLst>
-        </pc:spChg>
-        <pc:spChg chg="mod">
-          <ac:chgData name="Chennuboyina Siva Sruthi" userId="757dd6f6081b8728" providerId="LiveId" clId="{88ED0A32-7A4F-4E9F-9492-1FFBEDFADE5C}" dt="2026-09-10T16:24:52.939" v="13"/>
-          <ac:spMkLst>
-            <pc:docMk/>
-            <pc:sldMk cId="3962802212" sldId="343"/>
-            <ac:spMk id="18" creationId="{E89A9196-A5E7-0F2C-04FE-C684652C34F6}"/>
-          </ac:spMkLst>
-        </pc:spChg>
-        <pc:spChg chg="mod">
-          <ac:chgData name="Chennuboyina Siva Sruthi" userId="757dd6f6081b8728" providerId="LiveId" clId="{88ED0A32-7A4F-4E9F-9492-1FFBEDFADE5C}" dt="2026-09-10T17:01:40.446" v="20"/>
-          <ac:spMkLst>
-            <pc:docMk/>
-            <pc:sldMk cId="3962802212" sldId="343"/>
-            <ac:spMk id="21" creationId="{0750655E-F8CC-FCDE-B7AE-B74BE1D4ED69}"/>
-          </ac:spMkLst>
-        </pc:spChg>
-        <pc:spChg chg="mod">
-          <ac:chgData name="Chennuboyina Siva Sruthi" userId="757dd6f6081b8728" providerId="LiveId" clId="{88ED0A32-7A4F-4E9F-9492-1FFBEDFADE5C}" dt="2026-09-10T17:01:40.446" v="20"/>
-          <ac:spMkLst>
-            <pc:docMk/>
-            <pc:sldMk cId="3962802212" sldId="343"/>
-            <ac:spMk id="22" creationId="{8BCADF4E-C760-9662-2E12-C8F37CBC0456}"/>
-          </ac:spMkLst>
-        </pc:spChg>
-        <pc:spChg chg="mod">
-          <ac:chgData name="Chennuboyina Siva Sruthi" userId="757dd6f6081b8728" providerId="LiveId" clId="{88ED0A32-7A4F-4E9F-9492-1FFBEDFADE5C}" dt="2026-09-10T17:01:40.446" v="20"/>
-          <ac:spMkLst>
-            <pc:docMk/>
-            <pc:sldMk cId="3962802212" sldId="343"/>
-            <ac:spMk id="23" creationId="{1898CABE-80B6-B4CD-A0BC-5FA107B5FB8B}"/>
-          </ac:spMkLst>
-        </pc:spChg>
-        <pc:spChg chg="mod">
-          <ac:chgData name="Chennuboyina Siva Sruthi" userId="757dd6f6081b8728" providerId="LiveId" clId="{88ED0A32-7A4F-4E9F-9492-1FFBEDFADE5C}" dt="2026-09-10T17:01:40.446" v="20"/>
-          <ac:spMkLst>
-            <pc:docMk/>
-            <pc:sldMk cId="3962802212" sldId="343"/>
-            <ac:spMk id="24" creationId="{E89A9196-A5E7-0F2C-04FE-C684652C34F6}"/>
-          </ac:spMkLst>
-        </pc:spChg>
-        <pc:grpChg chg="del mod">
-          <ac:chgData name="Chennuboyina Siva Sruthi" userId="757dd6f6081b8728" providerId="LiveId" clId="{88ED0A32-7A4F-4E9F-9492-1FFBEDFADE5C}" dt="2026-09-10T16:24:50.133" v="12" actId="21"/>
-          <ac:grpSpMkLst>
-            <pc:docMk/>
-            <pc:sldMk cId="3962802212" sldId="343"/>
-            <ac:grpSpMk id="2" creationId="{A1242DCA-2330-C10D-F11B-831055512A57}"/>
-          </ac:grpSpMkLst>
-        </pc:grpChg>
-        <pc:grpChg chg="add del mod">
-          <ac:chgData name="Chennuboyina Siva Sruthi" userId="757dd6f6081b8728" providerId="LiveId" clId="{88ED0A32-7A4F-4E9F-9492-1FFBEDFADE5C}" dt="2026-09-10T17:01:13.271" v="19" actId="21"/>
-          <ac:grpSpMkLst>
-            <pc:docMk/>
-            <pc:sldMk cId="3962802212" sldId="343"/>
-            <ac:grpSpMk id="13" creationId="{A1242DCA-2330-C10D-F11B-831055512A57}"/>
-          </ac:grpSpMkLst>
-        </pc:grpChg>
-        <pc:grpChg chg="add del mod">
-          <ac:chgData name="Chennuboyina Siva Sruthi" userId="757dd6f6081b8728" providerId="LiveId" clId="{88ED0A32-7A4F-4E9F-9492-1FFBEDFADE5C}" dt="2026-09-10T17:01:51.050" v="21" actId="21"/>
-          <ac:grpSpMkLst>
-            <pc:docMk/>
-            <pc:sldMk cId="3962802212" sldId="343"/>
-            <ac:grpSpMk id="20" creationId="{A1242DCA-2330-C10D-F11B-831055512A57}"/>
-          </ac:grpSpMkLst>
-        </pc:grpChg>
-        <pc:picChg chg="mod">
-          <ac:chgData name="Chennuboyina Siva Sruthi" userId="757dd6f6081b8728" providerId="LiveId" clId="{88ED0A32-7A4F-4E9F-9492-1FFBEDFADE5C}" dt="2026-09-10T16:24:22.655" v="11" actId="14100"/>
-          <ac:picMkLst>
-            <pc:docMk/>
-            <pc:sldMk cId="3962802212" sldId="343"/>
-            <ac:picMk id="3" creationId="{750C8B0B-F124-E5D2-D7DA-AE012141909A}"/>
-          </ac:picMkLst>
-        </pc:picChg>
-        <pc:picChg chg="del mod">
-          <ac:chgData name="Chennuboyina Siva Sruthi" userId="757dd6f6081b8728" providerId="LiveId" clId="{88ED0A32-7A4F-4E9F-9492-1FFBEDFADE5C}" dt="2026-09-10T16:25:09.421" v="15" actId="21"/>
-          <ac:picMkLst>
-            <pc:docMk/>
-            <pc:sldMk cId="3962802212" sldId="343"/>
-            <ac:picMk id="14" creationId="{750C8B0B-F124-E5D2-D7DA-AE012141909A}"/>
-          </ac:picMkLst>
-        </pc:picChg>
-        <pc:picChg chg="mod">
-          <ac:chgData name="Chennuboyina Siva Sruthi" userId="757dd6f6081b8728" providerId="LiveId" clId="{88ED0A32-7A4F-4E9F-9492-1FFBEDFADE5C}" dt="2026-09-10T16:24:52.939" v="13"/>
-          <ac:picMkLst>
-            <pc:docMk/>
-            <pc:sldMk cId="3962802212" sldId="343"/>
-            <ac:picMk id="19" creationId="{69716582-C92D-C828-D61E-48D9AD98E889}"/>
-          </ac:picMkLst>
-        </pc:picChg>
-        <pc:picChg chg="mod">
-          <ac:chgData name="Chennuboyina Siva Sruthi" userId="757dd6f6081b8728" providerId="LiveId" clId="{88ED0A32-7A4F-4E9F-9492-1FFBEDFADE5C}" dt="2026-09-10T17:01:40.446" v="20"/>
-          <ac:picMkLst>
-            <pc:docMk/>
-            <pc:sldMk cId="3962802212" sldId="343"/>
-            <ac:picMk id="25" creationId="{69716582-C92D-C828-D61E-48D9AD98E889}"/>
-          </ac:picMkLst>
-        </pc:picChg>
         <pc:picChg chg="add mod">
           <ac:chgData name="Chennuboyina Siva Sruthi" userId="757dd6f6081b8728" providerId="LiveId" clId="{88ED0A32-7A4F-4E9F-9492-1FFBEDFADE5C}" dt="2026-09-10T17:02:37.495" v="25" actId="1076"/>
           <ac:picMkLst>
@@ -540,30 +420,6 @@
           <pc:docMk/>
           <pc:sldMk cId="1903979828" sldId="345"/>
         </pc:sldMkLst>
-        <pc:picChg chg="add del mod">
-          <ac:chgData name="Chennuboyina Siva Sruthi" userId="757dd6f6081b8728" providerId="LiveId" clId="{88ED0A32-7A4F-4E9F-9492-1FFBEDFADE5C}" dt="2026-09-10T17:31:45.323" v="320" actId="21"/>
-          <ac:picMkLst>
-            <pc:docMk/>
-            <pc:sldMk cId="1903979828" sldId="345"/>
-            <ac:picMk id="3" creationId="{5DC68DD0-885B-2751-8BAC-B8AC796D4D3D}"/>
-          </ac:picMkLst>
-        </pc:picChg>
-        <pc:picChg chg="add del mod">
-          <ac:chgData name="Chennuboyina Siva Sruthi" userId="757dd6f6081b8728" providerId="LiveId" clId="{88ED0A32-7A4F-4E9F-9492-1FFBEDFADE5C}" dt="2026-09-10T17:29:45.237" v="301" actId="21"/>
-          <ac:picMkLst>
-            <pc:docMk/>
-            <pc:sldMk cId="1903979828" sldId="345"/>
-            <ac:picMk id="9" creationId="{ACDFDC23-78D4-4B84-E449-B81A1676D354}"/>
-          </ac:picMkLst>
-        </pc:picChg>
-        <pc:picChg chg="add del">
-          <ac:chgData name="Chennuboyina Siva Sruthi" userId="757dd6f6081b8728" providerId="LiveId" clId="{88ED0A32-7A4F-4E9F-9492-1FFBEDFADE5C}" dt="2026-09-10T17:29:52.705" v="303" actId="21"/>
-          <ac:picMkLst>
-            <pc:docMk/>
-            <pc:sldMk cId="1903979828" sldId="345"/>
-            <ac:picMk id="12" creationId="{787BA9DB-174A-FF9B-87F8-8C6E34E4D995}"/>
-          </ac:picMkLst>
-        </pc:picChg>
         <pc:picChg chg="add mod">
           <ac:chgData name="Chennuboyina Siva Sruthi" userId="757dd6f6081b8728" providerId="LiveId" clId="{88ED0A32-7A4F-4E9F-9492-1FFBEDFADE5C}" dt="2026-09-10T17:31:53.451" v="323" actId="14100"/>
           <ac:picMkLst>
@@ -703,7 +559,7 @@
           <a:p>
             <a:fld id="{EF1077DB-935E-4A0A-947A-D283B9F9F452}" type="datetimeFigureOut">
               <a:rPr lang="en-US" smtClean="0"/>
-              <a:t>9/10/2026</a:t>
+              <a:t>9/13/2026</a:t>
             </a:fld>
             <a:endParaRPr lang="en-US" dirty="0"/>
           </a:p>
@@ -880,7 +736,7 @@
           <a:p>
             <a:fld id="{2D9EC30E-1A71-4188-9BE7-E2A64929A436}" type="datetimeFigureOut">
               <a:rPr lang="en-US" noProof="0" smtClean="0"/>
-              <a:t>9/10/2026</a:t>
+              <a:t>9/13/2026</a:t>
             </a:fld>
             <a:endParaRPr lang="en-US" noProof="0" dirty="0"/>
           </a:p>
@@ -1977,7 +1833,7 @@
             <a:fld id="{B61BEF0D-F0BB-DE4B-95CE-6DB70DBA9567}" type="datetimeFigureOut">
               <a:rPr lang="en-US" smtClean="0"/>
               <a:pPr/>
-              <a:t>9/10/2026</a:t>
+              <a:t>9/13/2026</a:t>
             </a:fld>
             <a:endParaRPr lang="en-US" dirty="0"/>
           </a:p>
@@ -2231,7 +2087,7 @@
             <a:fld id="{B61BEF0D-F0BB-DE4B-95CE-6DB70DBA9567}" type="datetimeFigureOut">
               <a:rPr lang="en-US" smtClean="0"/>
               <a:pPr/>
-              <a:t>9/10/2026</a:t>
+              <a:t>9/13/2026</a:t>
             </a:fld>
             <a:endParaRPr lang="en-US" dirty="0"/>
           </a:p>
@@ -2548,7 +2404,7 @@
             <a:fld id="{B61BEF0D-F0BB-DE4B-95CE-6DB70DBA9567}" type="datetimeFigureOut">
               <a:rPr lang="en-US" smtClean="0"/>
               <a:pPr/>
-              <a:t>9/10/2026</a:t>
+              <a:t>9/13/2026</a:t>
             </a:fld>
             <a:endParaRPr lang="en-US" dirty="0"/>
           </a:p>
@@ -2884,7 +2740,7 @@
             <a:fld id="{B61BEF0D-F0BB-DE4B-95CE-6DB70DBA9567}" type="datetimeFigureOut">
               <a:rPr lang="en-US" smtClean="0"/>
               <a:pPr/>
-              <a:t>9/10/2026</a:t>
+              <a:t>9/13/2026</a:t>
             </a:fld>
             <a:endParaRPr lang="en-US" dirty="0"/>
           </a:p>
@@ -3201,7 +3057,7 @@
             <a:fld id="{B61BEF0D-F0BB-DE4B-95CE-6DB70DBA9567}" type="datetimeFigureOut">
               <a:rPr lang="en-US" smtClean="0"/>
               <a:pPr/>
-              <a:t>9/10/2026</a:t>
+              <a:t>9/13/2026</a:t>
             </a:fld>
             <a:endParaRPr lang="en-US" dirty="0"/>
           </a:p>
@@ -3597,7 +3453,7 @@
             <a:fld id="{B61BEF0D-F0BB-DE4B-95CE-6DB70DBA9567}" type="datetimeFigureOut">
               <a:rPr lang="en-US" smtClean="0"/>
               <a:pPr/>
-              <a:t>9/10/2026</a:t>
+              <a:t>9/13/2026</a:t>
             </a:fld>
             <a:endParaRPr lang="en-US" dirty="0"/>
           </a:p>
@@ -3769,7 +3625,7 @@
           <a:p>
             <a:fld id="{55C6B4A9-1611-4792-9094-5F34BCA07E0B}" type="datetimeFigureOut">
               <a:rPr lang="en-US" smtClean="0"/>
-              <a:t>9/10/2026</a:t>
+              <a:t>9/13/2026</a:t>
             </a:fld>
             <a:endParaRPr lang="en-US" dirty="0"/>
           </a:p>
@@ -3951,7 +3807,7 @@
             <a:fld id="{B61BEF0D-F0BB-DE4B-95CE-6DB70DBA9567}" type="datetimeFigureOut">
               <a:rPr lang="en-US" smtClean="0"/>
               <a:pPr/>
-              <a:t>9/10/2026</a:t>
+              <a:t>9/13/2026</a:t>
             </a:fld>
             <a:endParaRPr lang="en-US" dirty="0"/>
           </a:p>
@@ -5680,7 +5536,7 @@
             <a:fld id="{B61BEF0D-F0BB-DE4B-95CE-6DB70DBA9567}" type="datetimeFigureOut">
               <a:rPr lang="en-US" smtClean="0"/>
               <a:pPr/>
-              <a:t>9/10/2026</a:t>
+              <a:t>9/13/2026</a:t>
             </a:fld>
             <a:endParaRPr lang="en-US" dirty="0"/>
           </a:p>
@@ -7415,7 +7271,7 @@
             <a:fld id="{B61BEF0D-F0BB-DE4B-95CE-6DB70DBA9567}" type="datetimeFigureOut">
               <a:rPr lang="en-US" smtClean="0"/>
               <a:pPr/>
-              <a:t>9/10/2026</a:t>
+              <a:t>9/13/2026</a:t>
             </a:fld>
             <a:endParaRPr lang="en-US" dirty="0"/>
           </a:p>
@@ -7649,7 +7505,7 @@
           <a:p>
             <a:fld id="{EB712588-04B1-427B-82EE-E8DB90309F08}" type="datetimeFigureOut">
               <a:rPr lang="en-US" smtClean="0"/>
-              <a:t>9/10/2026</a:t>
+              <a:t>9/13/2026</a:t>
             </a:fld>
             <a:endParaRPr lang="en-US" dirty="0"/>
           </a:p>
@@ -8025,7 +7881,7 @@
             <a:fld id="{B61BEF0D-F0BB-DE4B-95CE-6DB70DBA9567}" type="datetimeFigureOut">
               <a:rPr lang="en-US" smtClean="0"/>
               <a:pPr/>
-              <a:t>9/10/2026</a:t>
+              <a:t>9/13/2026</a:t>
             </a:fld>
             <a:endParaRPr lang="en-US" dirty="0"/>
           </a:p>
@@ -8151,7 +8007,7 @@
             <a:fld id="{B61BEF0D-F0BB-DE4B-95CE-6DB70DBA9567}" type="datetimeFigureOut">
               <a:rPr lang="en-US" smtClean="0"/>
               <a:pPr/>
-              <a:t>9/10/2026</a:t>
+              <a:t>9/13/2026</a:t>
             </a:fld>
             <a:endParaRPr lang="en-US" dirty="0"/>
           </a:p>
@@ -8249,7 +8105,7 @@
             <a:fld id="{B61BEF0D-F0BB-DE4B-95CE-6DB70DBA9567}" type="datetimeFigureOut">
               <a:rPr lang="en-US" smtClean="0"/>
               <a:pPr/>
-              <a:t>9/10/2026</a:t>
+              <a:t>9/13/2026</a:t>
             </a:fld>
             <a:endParaRPr lang="en-US" dirty="0"/>
           </a:p>
@@ -8506,7 +8362,7 @@
           <a:p>
             <a:fld id="{42A54C80-263E-416B-A8E0-580EDEADCBDC}" type="datetimeFigureOut">
               <a:rPr lang="en-US" smtClean="0"/>
-              <a:t>9/10/2026</a:t>
+              <a:t>9/13/2026</a:t>
             </a:fld>
             <a:endParaRPr lang="en-US" dirty="0"/>
           </a:p>
@@ -8814,7 +8670,7 @@
             <a:fld id="{B61BEF0D-F0BB-DE4B-95CE-6DB70DBA9567}" type="datetimeFigureOut">
               <a:rPr lang="en-US" smtClean="0"/>
               <a:pPr/>
-              <a:t>9/10/2026</a:t>
+              <a:t>9/13/2026</a:t>
             </a:fld>
             <a:endParaRPr lang="en-US" dirty="0"/>
           </a:p>
@@ -9518,7 +9374,7 @@
             <a:fld id="{B61BEF0D-F0BB-DE4B-95CE-6DB70DBA9567}" type="datetimeFigureOut">
               <a:rPr lang="en-US" smtClean="0"/>
               <a:pPr/>
-              <a:t>9/10/2026</a:t>
+              <a:t>9/13/2026</a:t>
             </a:fld>
             <a:endParaRPr lang="en-US" dirty="0"/>
           </a:p>
@@ -9729,7 +9585,7 @@
                 </a:solidFill>
               </a:rPr>
               <a:pPr/>
-              <a:t>9/10/2026</a:t>
+              <a:t>9/13/2026</a:t>
             </a:fld>
             <a:endParaRPr lang="en-US" sz="1100" dirty="0">
               <a:solidFill>
@@ -10483,7 +10339,7 @@
         <p:spPr>
           <a:xfrm>
             <a:off x="-223158" y="3583914"/>
-            <a:ext cx="6623957" cy="861497"/>
+            <a:ext cx="6684343" cy="861497"/>
           </a:xfrm>
         </p:spPr>
         <p:txBody>
@@ -10499,7 +10355,7 @@
                   <a:schemeClr val="tx1"/>
                 </a:solidFill>
               </a:rPr>
-              <a:t>[Student Name-CHENNUBOYINA SIVA SRUTHI </a:t>
+              <a:t>Student Name-CHENNUBOYINA SIVA SRUTHI </a:t>
             </a:r>
             <a:endParaRPr lang="en-IN" b="0" dirty="0">
               <a:solidFill>
@@ -10560,18 +10416,26 @@
         <p:spPr>
           <a:xfrm>
             <a:off x="678364" y="2844750"/>
-            <a:ext cx="4998720" cy="743448"/>
+            <a:ext cx="11044934" cy="743448"/>
           </a:xfrm>
         </p:spPr>
         <p:txBody>
           <a:bodyPr>
-            <a:normAutofit/>
+            <a:normAutofit fontScale="90000"/>
           </a:bodyPr>
           <a:lstStyle/>
           <a:p>
             <a:r>
               <a:rPr lang="en-GB" sz="3200" dirty="0"/>
               <a:t>Project Title -</a:t>
+            </a:r>
+            <a:r>
+              <a:rPr lang="en-US" sz="3200" b="1" dirty="0"/>
+              <a:t>Seasonal Agriculture Performance Analysis</a:t>
+            </a:r>
+            <a:r>
+              <a:rPr lang="en-US" sz="3200" dirty="0"/>
+              <a:t> 🌾📊</a:t>
             </a:r>
             <a:endParaRPr lang="en-IN" sz="3200" dirty="0"/>
           </a:p>
@@ -24618,15 +24482,6 @@
 </file>
 
 <file path=customXml/item1.xml><?xml version="1.0" encoding="utf-8"?>
-<p:properties xmlns:p="http://schemas.microsoft.com/office/2006/metadata/properties" xmlns:xsi="http://www.w3.org/2001/XMLSchema-instance" xmlns:pc="http://schemas.microsoft.com/office/infopath/2007/PartnerControls">
-  <documentManagement>
-    <Status xmlns="71af3243-3dd4-4a8d-8c0d-dd76da1f02a5">Not started</Status>
-    <MediaServiceKeyPoints xmlns="71af3243-3dd4-4a8d-8c0d-dd76da1f02a5" xsi:nil="true"/>
-  </documentManagement>
-</p:properties>
-</file>
-
-<file path=customXml/item2.xml><?xml version="1.0" encoding="utf-8"?>
 <ct:contentTypeSchema xmlns:ct="http://schemas.microsoft.com/office/2006/metadata/contentType" xmlns:ma="http://schemas.microsoft.com/office/2006/metadata/properties/metaAttributes" ct:_="" ma:_="" ma:contentTypeName="Document" ma:contentTypeID="0x01010079F111ED35F8CC479449609E8A0923A6" ma:contentTypeVersion="12" ma:contentTypeDescription="Create a new document." ma:contentTypeScope="" ma:versionID="426e97fa315356fffbdcd9876fe988c2">
   <xsd:schema xmlns:xsd="http://www.w3.org/2001/XMLSchema" xmlns:xs="http://www.w3.org/2001/XMLSchema" xmlns:p="http://schemas.microsoft.com/office/2006/metadata/properties" xmlns:ns2="71af3243-3dd4-4a8d-8c0d-dd76da1f02a5" xmlns:ns3="16c05727-aa75-4e4a-9b5f-8a80a1165891" targetNamespace="http://schemas.microsoft.com/office/2006/metadata/properties" ma:root="true" ma:fieldsID="14b8f0def80e6d70ce3def20c90759ae" ns2:_="" ns3:_="">
     <xsd:import namespace="71af3243-3dd4-4a8d-8c0d-dd76da1f02a5"/>
@@ -24847,6 +24702,15 @@
 </ct:contentTypeSchema>
 </file>
 
+<file path=customXml/item2.xml><?xml version="1.0" encoding="utf-8"?>
+<p:properties xmlns:p="http://schemas.microsoft.com/office/2006/metadata/properties" xmlns:xsi="http://www.w3.org/2001/XMLSchema-instance" xmlns:pc="http://schemas.microsoft.com/office/infopath/2007/PartnerControls">
+  <documentManagement>
+    <Status xmlns="71af3243-3dd4-4a8d-8c0d-dd76da1f02a5">Not started</Status>
+    <MediaServiceKeyPoints xmlns="71af3243-3dd4-4a8d-8c0d-dd76da1f02a5" xsi:nil="true"/>
+  </documentManagement>
+</p:properties>
+</file>
+
 <file path=customXml/item3.xml><?xml version="1.0" encoding="utf-8"?>
 <?mso-contentType ?>
 <FormTemplates xmlns="http://schemas.microsoft.com/sharepoint/v3/contenttype/forms">
@@ -24857,16 +24721,6 @@
 </file>
 
 <file path=customXml/itemProps1.xml><?xml version="1.0" encoding="utf-8"?>
-<ds:datastoreItem xmlns:ds="http://schemas.openxmlformats.org/officeDocument/2006/customXml" ds:itemID="{4DEA9014-ED64-4558-B1E1-D03F0EE32BEB}">
-  <ds:schemaRefs>
-    <ds:schemaRef ds:uri="http://schemas.microsoft.com/office/2006/metadata/properties"/>
-    <ds:schemaRef ds:uri="http://schemas.microsoft.com/office/infopath/2007/PartnerControls"/>
-    <ds:schemaRef ds:uri="71af3243-3dd4-4a8d-8c0d-dd76da1f02a5"/>
-  </ds:schemaRefs>
-</ds:datastoreItem>
-</file>
-
-<file path=customXml/itemProps2.xml><?xml version="1.0" encoding="utf-8"?>
 <ds:datastoreItem xmlns:ds="http://schemas.openxmlformats.org/officeDocument/2006/customXml" ds:itemID="{B19EB750-A6DA-4BE8-B87B-FC499FE73360}">
   <ds:schemaRefs>
     <ds:schemaRef ds:uri="http://schemas.microsoft.com/office/2006/metadata/contentType"/>
@@ -24885,6 +24739,16 @@
 </ds:datastoreItem>
 </file>
 
+<file path=customXml/itemProps2.xml><?xml version="1.0" encoding="utf-8"?>
+<ds:datastoreItem xmlns:ds="http://schemas.openxmlformats.org/officeDocument/2006/customXml" ds:itemID="{4DEA9014-ED64-4558-B1E1-D03F0EE32BEB}">
+  <ds:schemaRefs>
+    <ds:schemaRef ds:uri="http://schemas.microsoft.com/office/2006/metadata/properties"/>
+    <ds:schemaRef ds:uri="http://schemas.microsoft.com/office/infopath/2007/PartnerControls"/>
+    <ds:schemaRef ds:uri="71af3243-3dd4-4a8d-8c0d-dd76da1f02a5"/>
+  </ds:schemaRefs>
+</ds:datastoreItem>
+</file>
+
 <file path=customXml/itemProps3.xml><?xml version="1.0" encoding="utf-8"?>
 <ds:datastoreItem xmlns:ds="http://schemas.openxmlformats.org/officeDocument/2006/customXml" ds:itemID="{05D99ABA-76CE-4A8E-B5F0-C051B96628DE}">
   <ds:schemaRefs>
